--- a/presentation/v1_mnist/Capstone Preliminary Presentation.pptx
+++ b/presentation/v1_mnist/Capstone Preliminary Presentation.pptx
@@ -6983,7 +6983,7 @@
                 <a:ea typeface="EB Garamond" pitchFamily="18" charset="-122"/>
                 <a:cs typeface="EB Garamond" pitchFamily="18" charset="-120"/>
               </a:rPr>
-              <a:t>5.3</a:t>
+              <a:t>5.6</a:t>
             </a:r>
             <a:endParaRPr lang="en-US" sz="11000" dirty="0"/>
           </a:p>
@@ -7071,7 +7071,7 @@
                 <a:ea typeface="IBM Plex Sans" pitchFamily="34" charset="-122"/>
                 <a:cs typeface="IBM Plex Sans" pitchFamily="34" charset="-120"/>
               </a:rPr>
-              <a:t>225 clusters, median of 10 seeds (4.5–7.3) · hotspots hold 3.8% of images</a:t>
+              <a:t>225 clusters, median of 10 seeds (4.6–6.1) · hotspots hold 3.8% of images</a:t>
             </a:r>
             <a:endParaRPr lang="en-US" sz="1400" dirty="0"/>
           </a:p>
@@ -7416,7 +7416,7 @@
         <p:spPr>
           <a:xfrm>
             <a:off x="3378160" y="2514420"/>
-            <a:ext cx="3473410" cy="355580"/>
+            <a:ext cx="3520420" cy="355580"/>
           </a:xfrm>
           <a:prstGeom prst="roundRect">
             <a:avLst>
@@ -7444,7 +7444,7 @@
         </p:nvSpPr>
         <p:spPr>
           <a:xfrm>
-            <a:off x="7003971" y="2549959"/>
+            <a:off x="7050981" y="2549959"/>
             <a:ext cx="2318790" cy="309840"/>
           </a:xfrm>
           <a:prstGeom prst="rect">
@@ -7474,7 +7474,7 @@
                 <a:ea typeface="IBM Plex Sans" pitchFamily="34" charset="-122"/>
                 <a:cs typeface="IBM Plex Sans" pitchFamily="34" charset="-120"/>
               </a:rPr>
-              <a:t>0.684 (0.647–0.716)</a:t>
+              <a:t>0.693 (0.651–0.729)</a:t>
             </a:r>
             <a:endParaRPr lang="en-US" sz="1600" dirty="0"/>
           </a:p>
@@ -7889,7 +7889,7 @@
                 <a:ea typeface="IBM Plex Sans" pitchFamily="34" charset="-122"/>
                 <a:cs typeface="IBM Plex Sans" pitchFamily="34" charset="-120"/>
               </a:rPr>
-              <a:t>Average precision: SOM 0.053, k-means 0.030, kNN 0.228, max-softmax 0.336. Same 92 validation mistakes, 15×15 grid, 95% ranges in brackets. Bar length is proportional to AUROC.</a:t>
+              <a:t>Average precision: SOM 0.053, k-means 0.034, kNN 0.228, max-softmax 0.336. Same 92 validation mistakes, 15×15 grid, 95% ranges in brackets. Bar length is proportional to AUROC.</a:t>
             </a:r>
             <a:endParaRPr lang="en-US" sz="1300" dirty="0"/>
           </a:p>
